--- a/sample/graph2.pptx
+++ b/sample/graph2.pptx
@@ -120,7 +120,7 @@
               </a:lnSpc>
             </a:pPr>
             <a:r>
-              <a:rPr lang="ja-JP" altLang="en-US" sz="1000">
+              <a:rPr lang="ja-JP" altLang="en-US" sz="950">
                 <a:solidFill>
                   <a:srgbClr val="333333"/>
                 </a:solidFill>
@@ -167,7 +167,7 @@
               </a:lnSpc>
             </a:pPr>
             <a:r>
-              <a:rPr lang="ja-JP" altLang="en-US" sz="1000">
+              <a:rPr lang="ja-JP" altLang="en-US" sz="950">
                 <a:solidFill>
                   <a:srgbClr val="333333"/>
                 </a:solidFill>
@@ -214,7 +214,7 @@
               </a:lnSpc>
             </a:pPr>
             <a:r>
-              <a:rPr lang="ja-JP" altLang="en-US" sz="1000">
+              <a:rPr lang="ja-JP" altLang="en-US" sz="950">
                 <a:solidFill>
                   <a:srgbClr val="333333"/>
                 </a:solidFill>
@@ -259,7 +259,7 @@
               </a:lnSpc>
             </a:pPr>
             <a:r>
-              <a:rPr lang="ja-JP" altLang="en-US" sz="1000">
+              <a:rPr lang="ja-JP" altLang="en-US" sz="950">
                 <a:solidFill>
                   <a:srgbClr val="333333"/>
                 </a:solidFill>
@@ -304,7 +304,7 @@
               </a:lnSpc>
             </a:pPr>
             <a:r>
-              <a:rPr lang="ja-JP" altLang="en-US" sz="1000">
+              <a:rPr lang="ja-JP" altLang="en-US" sz="950">
                 <a:solidFill>
                   <a:srgbClr val="333333"/>
                 </a:solidFill>
@@ -349,7 +349,7 @@
               </a:lnSpc>
             </a:pPr>
             <a:r>
-              <a:rPr lang="ja-JP" altLang="en-US" sz="1000">
+              <a:rPr lang="ja-JP" altLang="en-US" sz="950">
                 <a:solidFill>
                   <a:srgbClr val="333333"/>
                 </a:solidFill>
@@ -394,7 +394,7 @@
               </a:lnSpc>
             </a:pPr>
             <a:r>
-              <a:rPr lang="ja-JP" altLang="en-US" sz="1000">
+              <a:rPr lang="ja-JP" altLang="en-US" sz="950">
                 <a:solidFill>
                   <a:srgbClr val="333333"/>
                 </a:solidFill>
@@ -441,7 +441,7 @@
               </a:lnSpc>
             </a:pPr>
             <a:r>
-              <a:rPr lang="ja-JP" altLang="en-US" sz="1000">
+              <a:rPr lang="ja-JP" altLang="en-US" sz="950">
                 <a:solidFill>
                   <a:srgbClr val="333333"/>
                 </a:solidFill>
@@ -488,7 +488,7 @@
               </a:lnSpc>
             </a:pPr>
             <a:r>
-              <a:rPr lang="ja-JP" altLang="en-US" sz="1000">
+              <a:rPr lang="ja-JP" altLang="en-US" sz="950">
                 <a:solidFill>
                   <a:srgbClr val="333333"/>
                 </a:solidFill>
@@ -533,7 +533,7 @@
               </a:lnSpc>
             </a:pPr>
             <a:r>
-              <a:rPr lang="ja-JP" altLang="en-US" sz="1000">
+              <a:rPr lang="ja-JP" altLang="en-US" sz="950">
                 <a:solidFill>
                   <a:srgbClr val="333333"/>
                 </a:solidFill>
@@ -550,7 +550,7 @@
               </a:lnSpc>
             </a:pPr>
             <a:r>
-              <a:rPr lang="ja-JP" altLang="en-US" sz="1000">
+              <a:rPr lang="ja-JP" altLang="en-US" sz="950">
                 <a:solidFill>
                   <a:srgbClr val="333333"/>
                 </a:solidFill>
@@ -796,8 +796,8 @@
         </p:nvSpPr>
         <p:spPr>
           <a:xfrm>
-            <a:off x="5854682" y="1385594"/>
-            <a:ext cx="420029" cy="219124"/>
+            <a:off x="5822540" y="1385594"/>
+            <a:ext cx="484313" cy="219124"/>
           </a:xfrm>
           <a:prstGeom prst="roundRect">
             <a:avLst/>
@@ -812,16 +812,16 @@
           </a:ln>
         </p:spPr>
         <p:txBody>
-          <a:bodyPr rtlCol="0" anchor="ctr" lIns="18288" tIns="9144" rIns="18288" bIns="9144"/>
-          <a:lstStyle/>
-          <a:p>
-            <a:pPr algn="ctr">
-              <a:lnSpc>
-                <a:spcPct val="150000"/>
-              </a:lnSpc>
-            </a:pPr>
-            <a:r>
-              <a:rPr lang="ja-JP" altLang="en-US" sz="1000">
+          <a:bodyPr rtlCol="0" anchor="ctr" wrap="none" lIns="0" tIns="0" rIns="0" bIns="0"/>
+          <a:lstStyle/>
+          <a:p>
+            <a:pPr algn="ctr">
+              <a:lnSpc>
+                <a:spcPct val="150000"/>
+              </a:lnSpc>
+            </a:pPr>
+            <a:r>
+              <a:rPr lang="ja-JP" altLang="en-US" sz="950">
                 <a:solidFill>
                   <a:srgbClr val="333333"/>
                 </a:solidFill>
@@ -841,8 +841,8 @@
         </p:nvSpPr>
         <p:spPr>
           <a:xfrm>
-            <a:off x="4391488" y="3788137"/>
-            <a:ext cx="563463" cy="219124"/>
+            <a:off x="4350740" y="3788137"/>
+            <a:ext cx="644959" cy="219124"/>
           </a:xfrm>
           <a:prstGeom prst="roundRect">
             <a:avLst/>
@@ -857,16 +857,16 @@
           </a:ln>
         </p:spPr>
         <p:txBody>
-          <a:bodyPr rtlCol="0" anchor="ctr" lIns="18288" tIns="9144" rIns="18288" bIns="9144"/>
-          <a:lstStyle/>
-          <a:p>
-            <a:pPr algn="ctr">
-              <a:lnSpc>
-                <a:spcPct val="150000"/>
-              </a:lnSpc>
-            </a:pPr>
-            <a:r>
-              <a:rPr lang="ja-JP" altLang="en-US" sz="1000">
+          <a:bodyPr rtlCol="0" anchor="ctr" wrap="none" lIns="0" tIns="0" rIns="0" bIns="0"/>
+          <a:lstStyle/>
+          <a:p>
+            <a:pPr algn="ctr">
+              <a:lnSpc>
+                <a:spcPct val="150000"/>
+              </a:lnSpc>
+            </a:pPr>
+            <a:r>
+              <a:rPr lang="ja-JP" altLang="en-US" sz="950">
                 <a:solidFill>
                   <a:srgbClr val="333333"/>
                 </a:solidFill>
@@ -886,8 +886,8 @@
         </p:nvSpPr>
         <p:spPr>
           <a:xfrm>
-            <a:off x="5422975" y="3788137"/>
-            <a:ext cx="563463" cy="219124"/>
+            <a:off x="5382227" y="3788137"/>
+            <a:ext cx="644959" cy="219124"/>
           </a:xfrm>
           <a:prstGeom prst="roundRect">
             <a:avLst/>
@@ -902,16 +902,16 @@
           </a:ln>
         </p:spPr>
         <p:txBody>
-          <a:bodyPr rtlCol="0" anchor="ctr" lIns="18288" tIns="9144" rIns="18288" bIns="9144"/>
-          <a:lstStyle/>
-          <a:p>
-            <a:pPr algn="ctr">
-              <a:lnSpc>
-                <a:spcPct val="150000"/>
-              </a:lnSpc>
-            </a:pPr>
-            <a:r>
-              <a:rPr lang="ja-JP" altLang="en-US" sz="1000">
+          <a:bodyPr rtlCol="0" anchor="ctr" wrap="none" lIns="0" tIns="0" rIns="0" bIns="0"/>
+          <a:lstStyle/>
+          <a:p>
+            <a:pPr algn="ctr">
+              <a:lnSpc>
+                <a:spcPct val="150000"/>
+              </a:lnSpc>
+            </a:pPr>
+            <a:r>
+              <a:rPr lang="ja-JP" altLang="en-US" sz="950">
                 <a:solidFill>
                   <a:srgbClr val="333333"/>
                 </a:solidFill>
@@ -931,8 +931,8 @@
         </p:nvSpPr>
         <p:spPr>
           <a:xfrm>
-            <a:off x="6080348" y="3788137"/>
-            <a:ext cx="688677" cy="219124"/>
+            <a:off x="6032087" y="3788137"/>
+            <a:ext cx="785198" cy="219124"/>
           </a:xfrm>
           <a:prstGeom prst="roundRect">
             <a:avLst/>
@@ -947,16 +947,16 @@
           </a:ln>
         </p:spPr>
         <p:txBody>
-          <a:bodyPr rtlCol="0" anchor="ctr" lIns="18288" tIns="9144" rIns="18288" bIns="9144"/>
-          <a:lstStyle/>
-          <a:p>
-            <a:pPr algn="ctr">
-              <a:lnSpc>
-                <a:spcPct val="150000"/>
-              </a:lnSpc>
-            </a:pPr>
-            <a:r>
-              <a:rPr lang="ja-JP" altLang="en-US" sz="1000">
+          <a:bodyPr rtlCol="0" anchor="ctr" wrap="none" lIns="0" tIns="0" rIns="0" bIns="0"/>
+          <a:lstStyle/>
+          <a:p>
+            <a:pPr algn="ctr">
+              <a:lnSpc>
+                <a:spcPct val="150000"/>
+              </a:lnSpc>
+            </a:pPr>
+            <a:r>
+              <a:rPr lang="ja-JP" altLang="en-US" sz="950">
                 <a:solidFill>
                   <a:srgbClr val="333333"/>
                 </a:solidFill>
@@ -976,8 +976,8 @@
         </p:nvSpPr>
         <p:spPr>
           <a:xfrm>
-            <a:off x="7174442" y="3788137"/>
-            <a:ext cx="688677" cy="219124"/>
+            <a:off x="7126181" y="3788137"/>
+            <a:ext cx="785198" cy="219124"/>
           </a:xfrm>
           <a:prstGeom prst="roundRect">
             <a:avLst/>
@@ -992,16 +992,16 @@
           </a:ln>
         </p:spPr>
         <p:txBody>
-          <a:bodyPr rtlCol="0" anchor="ctr" lIns="18288" tIns="9144" rIns="18288" bIns="9144"/>
-          <a:lstStyle/>
-          <a:p>
-            <a:pPr algn="ctr">
-              <a:lnSpc>
-                <a:spcPct val="150000"/>
-              </a:lnSpc>
-            </a:pPr>
-            <a:r>
-              <a:rPr lang="ja-JP" altLang="en-US" sz="1000">
+          <a:bodyPr rtlCol="0" anchor="ctr" wrap="none" lIns="0" tIns="0" rIns="0" bIns="0"/>
+          <a:lstStyle/>
+          <a:p>
+            <a:pPr algn="ctr">
+              <a:lnSpc>
+                <a:spcPct val="150000"/>
+              </a:lnSpc>
+            </a:pPr>
+            <a:r>
+              <a:rPr lang="ja-JP" altLang="en-US" sz="950">
                 <a:solidFill>
                   <a:srgbClr val="333333"/>
                 </a:solidFill>
@@ -1021,8 +1021,8 @@
         </p:nvSpPr>
         <p:spPr>
           <a:xfrm>
-            <a:off x="4845389" y="5511535"/>
-            <a:ext cx="313035" cy="219124"/>
+            <a:off x="4819666" y="5511535"/>
+            <a:ext cx="364479" cy="219124"/>
           </a:xfrm>
           <a:prstGeom prst="roundRect">
             <a:avLst/>
@@ -1037,16 +1037,16 @@
           </a:ln>
         </p:spPr>
         <p:txBody>
-          <a:bodyPr rtlCol="0" anchor="ctr" lIns="18288" tIns="9144" rIns="18288" bIns="9144"/>
-          <a:lstStyle/>
-          <a:p>
-            <a:pPr algn="ctr">
-              <a:lnSpc>
-                <a:spcPct val="150000"/>
-              </a:lnSpc>
-            </a:pPr>
-            <a:r>
-              <a:rPr lang="ja-JP" altLang="en-US" sz="1000">
+          <a:bodyPr rtlCol="0" anchor="ctr" wrap="none" lIns="0" tIns="0" rIns="0" bIns="0"/>
+          <a:lstStyle/>
+          <a:p>
+            <a:pPr algn="ctr">
+              <a:lnSpc>
+                <a:spcPct val="150000"/>
+              </a:lnSpc>
+            </a:pPr>
+            <a:r>
+              <a:rPr lang="ja-JP" altLang="en-US" sz="950">
                 <a:solidFill>
                   <a:srgbClr val="333333"/>
                 </a:solidFill>

--- a/sample/graph2.pptx
+++ b/sample/graph2.pptx
@@ -796,8 +796,8 @@
         </p:nvSpPr>
         <p:spPr>
           <a:xfrm>
-            <a:off x="5822540" y="1385594"/>
-            <a:ext cx="484313" cy="219124"/>
+            <a:off x="5821383" y="1373740"/>
+            <a:ext cx="486628" cy="242832"/>
           </a:xfrm>
           <a:prstGeom prst="roundRect">
             <a:avLst/>
@@ -841,8 +841,8 @@
         </p:nvSpPr>
         <p:spPr>
           <a:xfrm>
-            <a:off x="4350740" y="3788137"/>
-            <a:ext cx="644959" cy="219124"/>
+            <a:off x="4349583" y="3776283"/>
+            <a:ext cx="647273" cy="242832"/>
           </a:xfrm>
           <a:prstGeom prst="roundRect">
             <a:avLst/>
@@ -886,8 +886,8 @@
         </p:nvSpPr>
         <p:spPr>
           <a:xfrm>
-            <a:off x="5382227" y="3788137"/>
-            <a:ext cx="644959" cy="219124"/>
+            <a:off x="5381070" y="3776283"/>
+            <a:ext cx="647273" cy="242832"/>
           </a:xfrm>
           <a:prstGeom prst="roundRect">
             <a:avLst/>
@@ -931,8 +931,8 @@
         </p:nvSpPr>
         <p:spPr>
           <a:xfrm>
-            <a:off x="6032087" y="3788137"/>
-            <a:ext cx="785198" cy="219124"/>
+            <a:off x="6030930" y="3776283"/>
+            <a:ext cx="787513" cy="242832"/>
           </a:xfrm>
           <a:prstGeom prst="roundRect">
             <a:avLst/>
@@ -976,8 +976,8 @@
         </p:nvSpPr>
         <p:spPr>
           <a:xfrm>
-            <a:off x="7126181" y="3788137"/>
-            <a:ext cx="785198" cy="219124"/>
+            <a:off x="7125024" y="3776283"/>
+            <a:ext cx="787513" cy="242832"/>
           </a:xfrm>
           <a:prstGeom prst="roundRect">
             <a:avLst/>
@@ -1021,8 +1021,8 @@
         </p:nvSpPr>
         <p:spPr>
           <a:xfrm>
-            <a:off x="4819666" y="5511535"/>
-            <a:ext cx="364479" cy="219124"/>
+            <a:off x="4818509" y="5499681"/>
+            <a:ext cx="366794" cy="242832"/>
           </a:xfrm>
           <a:prstGeom prst="roundRect">
             <a:avLst/>

--- a/sample/graph2.pptx
+++ b/sample/graph2.pptx
@@ -111,7 +111,7 @@
           </a:ln>
         </p:spPr>
         <p:txBody>
-          <a:bodyPr rtlCol="0" anchor="t" lIns="18288" tIns="9144" rIns="18288" bIns="9144"/>
+          <a:bodyPr rtlCol="0" anchor="t" wrap="none" lIns="18288" tIns="9144" rIns="18288" bIns="9144"/>
           <a:lstStyle/>
           <a:p>
             <a:pPr algn="ctr">
@@ -158,7 +158,7 @@
           </a:ln>
         </p:spPr>
         <p:txBody>
-          <a:bodyPr rtlCol="0" anchor="t" lIns="18288" tIns="9144" rIns="18288" bIns="9144"/>
+          <a:bodyPr rtlCol="0" anchor="t" wrap="none" lIns="18288" tIns="9144" rIns="18288" bIns="9144"/>
           <a:lstStyle/>
           <a:p>
             <a:pPr algn="ctr">
@@ -205,7 +205,7 @@
           </a:ln>
         </p:spPr>
         <p:txBody>
-          <a:bodyPr rtlCol="0" anchor="t" lIns="18288" tIns="9144" rIns="18288" bIns="9144"/>
+          <a:bodyPr rtlCol="0" anchor="t" wrap="none" lIns="18288" tIns="9144" rIns="18288" bIns="9144"/>
           <a:lstStyle/>
           <a:p>
             <a:pPr algn="ctr">
@@ -250,7 +250,7 @@
           </a:ln>
         </p:spPr>
         <p:txBody>
-          <a:bodyPr rtlCol="0" anchor="ctr" lIns="18288" tIns="9144" rIns="18288" bIns="9144"/>
+          <a:bodyPr rtlCol="0" anchor="ctr" wrap="none" lIns="18288" tIns="9144" rIns="18288" bIns="9144"/>
           <a:lstStyle/>
           <a:p>
             <a:pPr algn="ctr">
@@ -295,7 +295,7 @@
           </a:ln>
         </p:spPr>
         <p:txBody>
-          <a:bodyPr rtlCol="0" anchor="ctr" lIns="18288" tIns="9144" rIns="18288" bIns="9144"/>
+          <a:bodyPr rtlCol="0" anchor="ctr" wrap="none" lIns="18288" tIns="9144" rIns="18288" bIns="9144"/>
           <a:lstStyle/>
           <a:p>
             <a:pPr algn="ctr">
@@ -340,7 +340,7 @@
           </a:ln>
         </p:spPr>
         <p:txBody>
-          <a:bodyPr rtlCol="0" anchor="ctr" lIns="18288" tIns="9144" rIns="18288" bIns="9144"/>
+          <a:bodyPr rtlCol="0" anchor="ctr" wrap="none" lIns="18288" tIns="9144" rIns="18288" bIns="9144"/>
           <a:lstStyle/>
           <a:p>
             <a:pPr algn="ctr">
@@ -385,7 +385,7 @@
           </a:ln>
         </p:spPr>
         <p:txBody>
-          <a:bodyPr rtlCol="0" anchor="ctr" lIns="18288" tIns="9144" rIns="18288" bIns="9144"/>
+          <a:bodyPr rtlCol="0" anchor="ctr" wrap="none" lIns="18288" tIns="9144" rIns="18288" bIns="9144"/>
           <a:lstStyle/>
           <a:p>
             <a:pPr algn="ctr">
@@ -432,7 +432,7 @@
           </a:ln>
         </p:spPr>
         <p:txBody>
-          <a:bodyPr rtlCol="0" anchor="ctr" lIns="18288" tIns="9144" rIns="18288" bIns="9144"/>
+          <a:bodyPr rtlCol="0" anchor="ctr" wrap="none" lIns="18288" tIns="9144" rIns="18288" bIns="9144"/>
           <a:lstStyle/>
           <a:p>
             <a:pPr algn="ctr">
@@ -479,7 +479,7 @@
           </a:ln>
         </p:spPr>
         <p:txBody>
-          <a:bodyPr rtlCol="0" anchor="ctr" lIns="18288" tIns="9144" rIns="18288" bIns="9144"/>
+          <a:bodyPr rtlCol="0" anchor="ctr" wrap="none" lIns="18288" tIns="9144" rIns="18288" bIns="9144"/>
           <a:lstStyle/>
           <a:p>
             <a:pPr algn="ctr">
@@ -524,7 +524,7 @@
           </a:ln>
         </p:spPr>
         <p:txBody>
-          <a:bodyPr rtlCol="0" anchor="ctr" lIns="18288" tIns="9144" rIns="18288" bIns="9144"/>
+          <a:bodyPr rtlCol="0" anchor="ctr" wrap="none" lIns="18288" tIns="9144" rIns="18288" bIns="9144"/>
           <a:lstStyle/>
           <a:p>
             <a:pPr algn="ctr">
